--- a/week13_python_dictionaries/dictionary_week_python6.pptx
+++ b/week13_python_dictionaries/dictionary_week_python6.pptx
@@ -215,7 +215,7 @@
           <a:p>
             <a:fld id="{31739141-2DAA-2346-BEF0-0594A5BB306A}" type="datetimeFigureOut">
               <a:rPr lang="en-US" smtClean="0"/>
-              <a:t>11/15/25</a:t>
+              <a:t>11/18/25</a:t>
             </a:fld>
             <a:endParaRPr lang="en-US"/>
           </a:p>
@@ -881,7 +881,7 @@
           <a:p>
             <a:fld id="{69F9884C-D6B0-574D-ABEB-4B3275C742BC}" type="datetimeFigureOut">
               <a:rPr lang="en-US" smtClean="0"/>
-              <a:t>11/15/25</a:t>
+              <a:t>11/18/25</a:t>
             </a:fld>
             <a:endParaRPr lang="en-US"/>
           </a:p>
@@ -1079,7 +1079,7 @@
           <a:p>
             <a:fld id="{69F9884C-D6B0-574D-ABEB-4B3275C742BC}" type="datetimeFigureOut">
               <a:rPr lang="en-US" smtClean="0"/>
-              <a:t>11/15/25</a:t>
+              <a:t>11/18/25</a:t>
             </a:fld>
             <a:endParaRPr lang="en-US"/>
           </a:p>
@@ -1287,7 +1287,7 @@
           <a:p>
             <a:fld id="{69F9884C-D6B0-574D-ABEB-4B3275C742BC}" type="datetimeFigureOut">
               <a:rPr lang="en-US" smtClean="0"/>
-              <a:t>11/15/25</a:t>
+              <a:t>11/18/25</a:t>
             </a:fld>
             <a:endParaRPr lang="en-US"/>
           </a:p>
@@ -1485,7 +1485,7 @@
           <a:p>
             <a:fld id="{69F9884C-D6B0-574D-ABEB-4B3275C742BC}" type="datetimeFigureOut">
               <a:rPr lang="en-US" smtClean="0"/>
-              <a:t>11/15/25</a:t>
+              <a:t>11/18/25</a:t>
             </a:fld>
             <a:endParaRPr lang="en-US"/>
           </a:p>
@@ -1760,7 +1760,7 @@
           <a:p>
             <a:fld id="{69F9884C-D6B0-574D-ABEB-4B3275C742BC}" type="datetimeFigureOut">
               <a:rPr lang="en-US" smtClean="0"/>
-              <a:t>11/15/25</a:t>
+              <a:t>11/18/25</a:t>
             </a:fld>
             <a:endParaRPr lang="en-US"/>
           </a:p>
@@ -2025,7 +2025,7 @@
           <a:p>
             <a:fld id="{69F9884C-D6B0-574D-ABEB-4B3275C742BC}" type="datetimeFigureOut">
               <a:rPr lang="en-US" smtClean="0"/>
-              <a:t>11/15/25</a:t>
+              <a:t>11/18/25</a:t>
             </a:fld>
             <a:endParaRPr lang="en-US"/>
           </a:p>
@@ -2437,7 +2437,7 @@
           <a:p>
             <a:fld id="{69F9884C-D6B0-574D-ABEB-4B3275C742BC}" type="datetimeFigureOut">
               <a:rPr lang="en-US" smtClean="0"/>
-              <a:t>11/15/25</a:t>
+              <a:t>11/18/25</a:t>
             </a:fld>
             <a:endParaRPr lang="en-US"/>
           </a:p>
@@ -2578,7 +2578,7 @@
           <a:p>
             <a:fld id="{69F9884C-D6B0-574D-ABEB-4B3275C742BC}" type="datetimeFigureOut">
               <a:rPr lang="en-US" smtClean="0"/>
-              <a:t>11/15/25</a:t>
+              <a:t>11/18/25</a:t>
             </a:fld>
             <a:endParaRPr lang="en-US"/>
           </a:p>
@@ -2691,7 +2691,7 @@
           <a:p>
             <a:fld id="{69F9884C-D6B0-574D-ABEB-4B3275C742BC}" type="datetimeFigureOut">
               <a:rPr lang="en-US" smtClean="0"/>
-              <a:t>11/15/25</a:t>
+              <a:t>11/18/25</a:t>
             </a:fld>
             <a:endParaRPr lang="en-US"/>
           </a:p>
@@ -3002,7 +3002,7 @@
           <a:p>
             <a:fld id="{69F9884C-D6B0-574D-ABEB-4B3275C742BC}" type="datetimeFigureOut">
               <a:rPr lang="en-US" smtClean="0"/>
-              <a:t>11/15/25</a:t>
+              <a:t>11/18/25</a:t>
             </a:fld>
             <a:endParaRPr lang="en-US"/>
           </a:p>
@@ -3290,7 +3290,7 @@
           <a:p>
             <a:fld id="{69F9884C-D6B0-574D-ABEB-4B3275C742BC}" type="datetimeFigureOut">
               <a:rPr lang="en-US" smtClean="0"/>
-              <a:t>11/15/25</a:t>
+              <a:t>11/18/25</a:t>
             </a:fld>
             <a:endParaRPr lang="en-US"/>
           </a:p>
@@ -3531,7 +3531,7 @@
           <a:p>
             <a:fld id="{69F9884C-D6B0-574D-ABEB-4B3275C742BC}" type="datetimeFigureOut">
               <a:rPr lang="en-US" smtClean="0"/>
-              <a:t>11/15/25</a:t>
+              <a:t>11/18/25</a:t>
             </a:fld>
             <a:endParaRPr lang="en-US"/>
           </a:p>
@@ -3992,7 +3992,7 @@
                 <a:latin typeface="Helvetica Light" panose="020B0403020202020204" pitchFamily="34" charset="0"/>
                 <a:cs typeface="Courier New" panose="02070309020205020404" pitchFamily="49" charset="0"/>
               </a:rPr>
-              <a:t>Dictionaries (see python for biologists dictionary tutorial)</a:t>
+              <a:t>Dictionaries (see python for biologist’s dictionary tutorial)</a:t>
             </a:r>
           </a:p>
           <a:p>
@@ -5779,13 +5779,7 @@
               <a:rPr lang="en-US" sz="2800" dirty="0">
                 <a:latin typeface="Helvetica Light" panose="020B0403020202020204" pitchFamily="34" charset="0"/>
               </a:rPr>
-              <a:t>Fast </a:t>
-            </a:r>
-            <a:r>
-              <a:rPr lang="en-US" sz="2800" dirty="0">
-                <a:latin typeface="Helvetica Light" panose="020B0403020202020204" pitchFamily="34" charset="0"/>
-              </a:rPr>
-              <a:t>lookup of biological entities (genes, transcripts, samples)</a:t>
+              <a:t>Fast lookup of biological entities (genes, transcripts, samples)</a:t>
             </a:r>
           </a:p>
           <a:p>
@@ -5806,13 +5800,7 @@
               <a:rPr lang="en-US" sz="2800" dirty="0">
                 <a:latin typeface="Helvetica Light" panose="020B0403020202020204" pitchFamily="34" charset="0"/>
               </a:rPr>
-              <a:t>Flexible </a:t>
-            </a:r>
-            <a:r>
-              <a:rPr lang="en-US" sz="2800" dirty="0">
-                <a:latin typeface="Helvetica Light" panose="020B0403020202020204" pitchFamily="34" charset="0"/>
-              </a:rPr>
-              <a:t>storage for complex annotations and metadata</a:t>
+              <a:t>Flexible storage for complex annotations and metadata</a:t>
             </a:r>
           </a:p>
           <a:p>
@@ -5833,13 +5821,7 @@
               <a:rPr lang="en-US" sz="2800" dirty="0">
                 <a:latin typeface="Helvetica Light" panose="020B0403020202020204" pitchFamily="34" charset="0"/>
               </a:rPr>
-              <a:t>Human-readable </a:t>
-            </a:r>
-            <a:r>
-              <a:rPr lang="en-US" sz="2800" dirty="0">
-                <a:latin typeface="Helvetica Light" panose="020B0403020202020204" pitchFamily="34" charset="0"/>
-              </a:rPr>
-              <a:t>keys that reflect biological meaning</a:t>
+              <a:t>Human-readable keys that reflect biological meaning</a:t>
             </a:r>
           </a:p>
           <a:p>
@@ -5946,13 +5928,7 @@
               <a:rPr lang="en-US" sz="2800" dirty="0">
                 <a:latin typeface="Helvetica Light" panose="020B0403020202020204" pitchFamily="34" charset="0"/>
               </a:rPr>
-              <a:t>Gene </a:t>
-            </a:r>
-            <a:r>
-              <a:rPr lang="en-US" sz="2800" dirty="0">
-                <a:latin typeface="Helvetica Light" panose="020B0403020202020204" pitchFamily="34" charset="0"/>
-              </a:rPr>
-              <a:t>→ metadata (coordinates, product, GO terms)</a:t>
+              <a:t>Gene → metadata (coordinates, product, GO terms)</a:t>
             </a:r>
           </a:p>
           <a:p>
@@ -6126,17 +6102,8 @@
               <a:rPr lang="en-US" sz="3400" dirty="0">
                 <a:latin typeface="Helvetica Light" panose="020B0403020202020204" pitchFamily="34" charset="0"/>
               </a:rPr>
-              <a:t>Counting the number of times a list of </a:t>
-            </a:r>
-            <a:r>
-              <a:rPr lang="en-US" sz="3400" dirty="0">
-                <a:latin typeface="Helvetica Light" panose="020B0403020202020204" pitchFamily="34" charset="0"/>
-              </a:rPr>
-              <a:t>things occurs</a:t>
-            </a:r>
-            <a:endParaRPr lang="en-US" sz="3400" dirty="0">
-              <a:latin typeface="Helvetica Light" panose="020B0403020202020204" pitchFamily="34" charset="0"/>
-            </a:endParaRPr>
+              <a:t>Counting the number of times a list of things occurs</a:t>
+            </a:r>
           </a:p>
           <a:p>
             <a:pPr>
@@ -6307,13 +6274,7 @@
               <a:rPr lang="en-US" sz="2800" dirty="0">
                 <a:latin typeface="Helvetica Light" panose="020B0403020202020204" pitchFamily="34" charset="0"/>
               </a:rPr>
-              <a:t>192 </a:t>
-            </a:r>
-            <a:r>
-              <a:rPr lang="en-US" sz="2800" dirty="0">
-                <a:latin typeface="Helvetica Light" panose="020B0403020202020204" pitchFamily="34" charset="0"/>
-              </a:rPr>
-              <a:t>samples (birds), 25,000,000 DNA sequences</a:t>
+              <a:t>192 samples (birds), 25,000,000 DNA sequences</a:t>
             </a:r>
           </a:p>
           <a:p>
